--- a/Diplomski_Rad_Prezentacija_Amira_Mehić .pptx
+++ b/Diplomski_Rad_Prezentacija_Amira_Mehić .pptx
@@ -6456,7 +6456,7 @@
                 <a:ea typeface="Calibri" pitchFamily="34" charset="-122"/>
                 <a:cs typeface="Arial" panose="020B0604020202020204" pitchFamily="34" charset="0"/>
               </a:rPr>
-              <a:t> tempo </a:t>
+              <a:t> tempo</a:t>
             </a:r>
             <a:r>
               <a:rPr lang="hr-HR" sz="1200" dirty="0">
@@ -6467,7 +6467,7 @@
                 <a:ea typeface="Calibri" pitchFamily="34" charset="-122"/>
                 <a:cs typeface="Arial" panose="020B0604020202020204" pitchFamily="34" charset="0"/>
               </a:rPr>
-              <a:t> </a:t>
+              <a:t>, a s</a:t>
             </a:r>
             <a:r>
               <a:rPr lang="en-US" sz="1200" dirty="0" err="1">
@@ -13674,11 +13674,11 @@
           <a:p>
             <a:pPr>
               <a:lnSpc>
-                <a:spcPct val="109322"/>
+                <a:spcPct val="100000"/>
               </a:lnSpc>
             </a:pPr>
             <a:r>
-              <a:rPr lang="en-US" sz="900" b="1" kern="0" spc="72" dirty="0">
+              <a:rPr lang="hr-HR" sz="900" b="1" kern="0" spc="72">
                 <a:solidFill>
                   <a:srgbClr val="B5AEA6"/>
                 </a:solidFill>
@@ -13686,7 +13686,7 @@
                 <a:ea typeface="Arial" pitchFamily="34" charset="-122"/>
                 <a:cs typeface="Arial" pitchFamily="34" charset="-120"/>
               </a:rPr>
-              <a:t>PROVJERENO</a:t>
+              <a:t>TESTIRANI SEGMENTI</a:t>
             </a:r>
             <a:endParaRPr lang="en-US" sz="900" dirty="0"/>
           </a:p>

--- a/Diplomski_Rad_Prezentacija_Amira_Mehić .pptx
+++ b/Diplomski_Rad_Prezentacija_Amira_Mehić .pptx
@@ -10352,7 +10352,7 @@
                 <a:ea typeface="Arial" pitchFamily="34" charset="-122"/>
                 <a:cs typeface="Arial" pitchFamily="34" charset="-120"/>
               </a:rPr>
-              <a:t>–</a:t>
+              <a:t>-</a:t>
             </a:r>
             <a:r>
               <a:rPr lang="en-US" sz="900" b="1" dirty="0">
@@ -12021,7 +12021,62 @@
                 <a:ea typeface="Courier New" pitchFamily="34" charset="-122"/>
                 <a:cs typeface="Courier New" pitchFamily="34" charset="-120"/>
               </a:rPr>
-              <a:t>$ node test/run.js</a:t>
+              <a:t>$ node </a:t>
+            </a:r>
+            <a:r>
+              <a:rPr lang="hr-HR" sz="975" dirty="0" err="1">
+                <a:solidFill>
+                  <a:srgbClr val="BAB6B6"/>
+                </a:solidFill>
+                <a:latin typeface="Courier New" pitchFamily="34" charset="0"/>
+                <a:ea typeface="Courier New" pitchFamily="34" charset="-122"/>
+                <a:cs typeface="Courier New" pitchFamily="34" charset="-120"/>
+              </a:rPr>
+              <a:t>scripts</a:t>
+            </a:r>
+            <a:r>
+              <a:rPr lang="en-US" sz="975" dirty="0">
+                <a:solidFill>
+                  <a:srgbClr val="BAB6B6"/>
+                </a:solidFill>
+                <a:latin typeface="Courier New" pitchFamily="34" charset="0"/>
+                <a:ea typeface="Courier New" pitchFamily="34" charset="-122"/>
+                <a:cs typeface="Courier New" pitchFamily="34" charset="-120"/>
+              </a:rPr>
+              <a:t>/run</a:t>
+            </a:r>
+            <a:r>
+              <a:rPr lang="hr-HR" sz="975" dirty="0">
+                <a:solidFill>
+                  <a:srgbClr val="BAB6B6"/>
+                </a:solidFill>
+                <a:latin typeface="Courier New" pitchFamily="34" charset="0"/>
+                <a:ea typeface="Courier New" pitchFamily="34" charset="-122"/>
+                <a:cs typeface="Courier New" pitchFamily="34" charset="-120"/>
+              </a:rPr>
+              <a:t>-</a:t>
+            </a:r>
+            <a:r>
+              <a:rPr lang="hr-HR" sz="975" dirty="0" err="1">
+                <a:solidFill>
+                  <a:srgbClr val="BAB6B6"/>
+                </a:solidFill>
+                <a:latin typeface="Courier New" pitchFamily="34" charset="0"/>
+                <a:ea typeface="Courier New" pitchFamily="34" charset="-122"/>
+                <a:cs typeface="Courier New" pitchFamily="34" charset="-120"/>
+              </a:rPr>
+              <a:t>tests</a:t>
+            </a:r>
+            <a:r>
+              <a:rPr lang="en-US" sz="975" dirty="0">
+                <a:solidFill>
+                  <a:srgbClr val="BAB6B6"/>
+                </a:solidFill>
+                <a:latin typeface="Courier New" pitchFamily="34" charset="0"/>
+                <a:ea typeface="Courier New" pitchFamily="34" charset="-122"/>
+                <a:cs typeface="Courier New" pitchFamily="34" charset="-120"/>
+              </a:rPr>
+              <a:t>.js</a:t>
             </a:r>
             <a:endParaRPr lang="en-US" sz="975" dirty="0"/>
           </a:p>
@@ -13678,7 +13733,7 @@
               </a:lnSpc>
             </a:pPr>
             <a:r>
-              <a:rPr lang="hr-HR" sz="900" b="1" kern="0" spc="72">
+              <a:rPr lang="hr-HR" sz="900" b="1" kern="0" spc="72" dirty="0">
                 <a:solidFill>
                   <a:srgbClr val="B5AEA6"/>
                 </a:solidFill>
@@ -13686,7 +13741,7 @@
                 <a:ea typeface="Arial" pitchFamily="34" charset="-122"/>
                 <a:cs typeface="Arial" pitchFamily="34" charset="-120"/>
               </a:rPr>
-              <a:t>TESTIRANI SEGMENTI</a:t>
+              <a:t>PROVJERENO</a:t>
             </a:r>
             <a:endParaRPr lang="en-US" sz="900" dirty="0"/>
           </a:p>
@@ -14025,10 +14080,10 @@
                 <a:ea typeface="Arial" pitchFamily="34" charset="-122"/>
                 <a:cs typeface="Arial" pitchFamily="34" charset="-120"/>
               </a:rPr>
-              <a:t>audio </a:t>
-            </a:r>
-            <a:r>
-              <a:rPr lang="en-US" sz="1200" dirty="0" err="1">
+              <a:t>audio Kur</a:t>
+            </a:r>
+            <a:r>
+              <a:rPr lang="hr-HR" sz="1200" dirty="0">
                 <a:solidFill>
                   <a:srgbClr val="F3F2F2"/>
                 </a:solidFill>
@@ -14036,7 +14091,7 @@
                 <a:ea typeface="Arial" pitchFamily="34" charset="-122"/>
                 <a:cs typeface="Arial" pitchFamily="34" charset="-120"/>
               </a:rPr>
-              <a:t>Kur’an</a:t>
+              <a:t>’</a:t>
             </a:r>
             <a:r>
               <a:rPr lang="en-US" sz="1200" dirty="0">
@@ -14047,7 +14102,7 @@
                 <a:ea typeface="Arial" pitchFamily="34" charset="-122"/>
                 <a:cs typeface="Arial" pitchFamily="34" charset="-120"/>
               </a:rPr>
-              <a:t> </a:t>
+              <a:t>an </a:t>
             </a:r>
             <a:endParaRPr lang="hr-HR" sz="1200" dirty="0">
               <a:solidFill>
@@ -14955,45 +15010,6 @@
               <a:t>Zaključak</a:t>
             </a:r>
             <a:endParaRPr lang="en-US" sz="1700" dirty="0"/>
-          </a:p>
-        </p:txBody>
-      </p:sp>
-      <p:sp>
-        <p:nvSpPr>
-          <p:cNvPr id="21" name="Text 19"/>
-          <p:cNvSpPr txBox="1"/>
-          <p:nvPr/>
-        </p:nvSpPr>
-        <p:spPr>
-          <a:xfrm>
-            <a:off x="8092440" y="4541741"/>
-            <a:ext cx="777240" cy="256032"/>
-          </a:xfrm>
-          <a:prstGeom prst="rect">
-            <a:avLst/>
-          </a:prstGeom>
-          <a:noFill/>
-          <a:ln/>
-        </p:spPr>
-        <p:txBody>
-          <a:bodyPr wrap="square" lIns="0" tIns="0" rIns="0" bIns="0" rtlCol="0" anchor="ctr"/>
-          <a:lstStyle/>
-          <a:p>
-            <a:pPr marL="0" indent="0" algn="r">
-              <a:buNone/>
-            </a:pPr>
-            <a:r>
-              <a:rPr lang="en-US" sz="900" dirty="0">
-                <a:solidFill>
-                  <a:srgbClr val="9A9A9A"/>
-                </a:solidFill>
-                <a:latin typeface="Calibri" pitchFamily="34" charset="0"/>
-                <a:ea typeface="Calibri" pitchFamily="34" charset="-122"/>
-                <a:cs typeface="Calibri" pitchFamily="34" charset="-120"/>
-              </a:rPr>
-              <a:t>2 / 22</a:t>
-            </a:r>
-            <a:endParaRPr lang="en-US" sz="900" dirty="0"/>
           </a:p>
         </p:txBody>
       </p:sp>
@@ -24569,8 +24585,8 @@
         </p:nvSpPr>
         <p:spPr>
           <a:xfrm>
-            <a:off x="5388302" y="1350977"/>
-            <a:ext cx="136259" cy="2512185"/>
+            <a:off x="5357064" y="1350977"/>
+            <a:ext cx="167498" cy="2512185"/>
           </a:xfrm>
           <a:prstGeom prst="rect">
             <a:avLst/>

--- a/Diplomski_Rad_Prezentacija_Amira_Mehić .pptx
+++ b/Diplomski_Rad_Prezentacija_Amira_Mehić .pptx
@@ -5,7 +5,7 @@
     <p:sldMasterId id="2147483648" r:id="rId1"/>
   </p:sldMasterIdLst>
   <p:notesMasterIdLst>
-    <p:notesMasterId r:id="rId23"/>
+    <p:notesMasterId r:id="rId25"/>
   </p:notesMasterIdLst>
   <p:sldIdLst>
     <p:sldId id="256" r:id="rId2"/>
@@ -29,6 +29,8 @@
     <p:sldId id="294" r:id="rId20"/>
     <p:sldId id="295" r:id="rId21"/>
     <p:sldId id="296" r:id="rId22"/>
+    <p:sldId id="297" r:id="rId23"/>
+    <p:sldId id="298" r:id="rId24"/>
   </p:sldIdLst>
   <p:sldSz cx="9144000" cy="5143500" type="screen16x9"/>
   <p:notesSz cx="5143500" cy="9144000"/>
@@ -1424,6 +1426,222 @@
     <p:extLst>
       <p:ext uri="{BB962C8B-B14F-4D97-AF65-F5344CB8AC3E}">
         <p14:creationId xmlns:p14="http://schemas.microsoft.com/office/powerpoint/2010/main" val="1024086991"/>
+      </p:ext>
+    </p:extLst>
+  </p:cSld>
+  <p:clrMapOvr>
+    <a:masterClrMapping/>
+  </p:clrMapOvr>
+</p:notes>
+</file>
+
+<file path=ppt/notesSlides/notesSlide22.xml><?xml version="1.0" encoding="utf-8"?>
+<p:notes xmlns:a="http://schemas.openxmlformats.org/drawingml/2006/main" xmlns:r="http://schemas.openxmlformats.org/officeDocument/2006/relationships" xmlns:p="http://schemas.openxmlformats.org/presentationml/2006/main">
+  <p:cSld>
+    <p:spTree>
+      <p:nvGrpSpPr>
+        <p:cNvPr id="1" name="">
+          <a:extLst>
+            <a:ext uri="{FF2B5EF4-FFF2-40B4-BE49-F238E27FC236}">
+              <a16:creationId xmlns:a16="http://schemas.microsoft.com/office/drawing/2014/main" id="{4831E9A9-3B3D-6966-26ED-DFE61DB70902}"/>
+            </a:ext>
+          </a:extLst>
+        </p:cNvPr>
+        <p:cNvGrpSpPr/>
+        <p:nvPr/>
+      </p:nvGrpSpPr>
+      <p:grpSpPr>
+        <a:xfrm>
+          <a:off x="0" y="0"/>
+          <a:ext cx="0" cy="0"/>
+          <a:chOff x="0" y="0"/>
+          <a:chExt cx="0" cy="0"/>
+        </a:xfrm>
+      </p:grpSpPr>
+      <p:sp>
+        <p:nvSpPr>
+          <p:cNvPr id="2" name="Slide Image Placeholder 1">
+            <a:extLst>
+              <a:ext uri="{FF2B5EF4-FFF2-40B4-BE49-F238E27FC236}">
+                <a16:creationId xmlns:a16="http://schemas.microsoft.com/office/drawing/2014/main" id="{4100C02E-8905-AFC0-0673-6C814FF8744C}"/>
+              </a:ext>
+            </a:extLst>
+          </p:cNvPr>
+          <p:cNvSpPr>
+            <a:spLocks noGrp="1" noRot="1" noChangeAspect="1"/>
+          </p:cNvSpPr>
+          <p:nvPr>
+            <p:ph type="sldImg"/>
+          </p:nvPr>
+        </p:nvSpPr>
+        <p:spPr/>
+      </p:sp>
+      <p:sp>
+        <p:nvSpPr>
+          <p:cNvPr id="3" name="Notes Placeholder 2">
+            <a:extLst>
+              <a:ext uri="{FF2B5EF4-FFF2-40B4-BE49-F238E27FC236}">
+                <a16:creationId xmlns:a16="http://schemas.microsoft.com/office/drawing/2014/main" id="{9BF10BDB-3848-4DD8-1647-BAE496C670CC}"/>
+              </a:ext>
+            </a:extLst>
+          </p:cNvPr>
+          <p:cNvSpPr>
+            <a:spLocks noGrp="1"/>
+          </p:cNvSpPr>
+          <p:nvPr>
+            <p:ph type="body" idx="1"/>
+          </p:nvPr>
+        </p:nvSpPr>
+        <p:spPr/>
+        <p:txBody>
+          <a:bodyPr/>
+          <a:lstStyle/>
+          <a:p>
+            <a:endParaRPr lang="en-US" dirty="0"/>
+          </a:p>
+        </p:txBody>
+      </p:sp>
+      <p:sp>
+        <p:nvSpPr>
+          <p:cNvPr id="4" name="Slide Number Placeholder 3">
+            <a:extLst>
+              <a:ext uri="{FF2B5EF4-FFF2-40B4-BE49-F238E27FC236}">
+                <a16:creationId xmlns:a16="http://schemas.microsoft.com/office/drawing/2014/main" id="{CA5F2236-5928-C89B-DB8E-806F71B11C93}"/>
+              </a:ext>
+            </a:extLst>
+          </p:cNvPr>
+          <p:cNvSpPr>
+            <a:spLocks noGrp="1"/>
+          </p:cNvSpPr>
+          <p:nvPr>
+            <p:ph type="sldNum" sz="quarter" idx="10"/>
+          </p:nvPr>
+        </p:nvSpPr>
+        <p:spPr/>
+        <p:txBody>
+          <a:bodyPr/>
+          <a:lstStyle/>
+          <a:p>
+            <a:fld id="{F7021451-1387-4CA6-816F-3879F97B5CBC}" type="slidenum">
+              <a:rPr lang="en-US"/>
+              <a:t>22</a:t>
+            </a:fld>
+            <a:endParaRPr lang="en-US"/>
+          </a:p>
+        </p:txBody>
+      </p:sp>
+    </p:spTree>
+    <p:extLst>
+      <p:ext uri="{BB962C8B-B14F-4D97-AF65-F5344CB8AC3E}">
+        <p14:creationId xmlns:p14="http://schemas.microsoft.com/office/powerpoint/2010/main" val="3003122042"/>
+      </p:ext>
+    </p:extLst>
+  </p:cSld>
+  <p:clrMapOvr>
+    <a:masterClrMapping/>
+  </p:clrMapOvr>
+</p:notes>
+</file>
+
+<file path=ppt/notesSlides/notesSlide23.xml><?xml version="1.0" encoding="utf-8"?>
+<p:notes xmlns:a="http://schemas.openxmlformats.org/drawingml/2006/main" xmlns:r="http://schemas.openxmlformats.org/officeDocument/2006/relationships" xmlns:p="http://schemas.openxmlformats.org/presentationml/2006/main">
+  <p:cSld>
+    <p:spTree>
+      <p:nvGrpSpPr>
+        <p:cNvPr id="1" name="">
+          <a:extLst>
+            <a:ext uri="{FF2B5EF4-FFF2-40B4-BE49-F238E27FC236}">
+              <a16:creationId xmlns:a16="http://schemas.microsoft.com/office/drawing/2014/main" id="{ED0D1E76-2B84-6F42-2211-1466590DC9D8}"/>
+            </a:ext>
+          </a:extLst>
+        </p:cNvPr>
+        <p:cNvGrpSpPr/>
+        <p:nvPr/>
+      </p:nvGrpSpPr>
+      <p:grpSpPr>
+        <a:xfrm>
+          <a:off x="0" y="0"/>
+          <a:ext cx="0" cy="0"/>
+          <a:chOff x="0" y="0"/>
+          <a:chExt cx="0" cy="0"/>
+        </a:xfrm>
+      </p:grpSpPr>
+      <p:sp>
+        <p:nvSpPr>
+          <p:cNvPr id="2" name="Slide Image Placeholder 1">
+            <a:extLst>
+              <a:ext uri="{FF2B5EF4-FFF2-40B4-BE49-F238E27FC236}">
+                <a16:creationId xmlns:a16="http://schemas.microsoft.com/office/drawing/2014/main" id="{FBC3852F-0F05-2A82-F433-95CE4AB48340}"/>
+              </a:ext>
+            </a:extLst>
+          </p:cNvPr>
+          <p:cNvSpPr>
+            <a:spLocks noGrp="1" noRot="1" noChangeAspect="1"/>
+          </p:cNvSpPr>
+          <p:nvPr>
+            <p:ph type="sldImg"/>
+          </p:nvPr>
+        </p:nvSpPr>
+        <p:spPr/>
+      </p:sp>
+      <p:sp>
+        <p:nvSpPr>
+          <p:cNvPr id="3" name="Notes Placeholder 2">
+            <a:extLst>
+              <a:ext uri="{FF2B5EF4-FFF2-40B4-BE49-F238E27FC236}">
+                <a16:creationId xmlns:a16="http://schemas.microsoft.com/office/drawing/2014/main" id="{6E7C9955-8839-549F-92C2-866D864A8550}"/>
+              </a:ext>
+            </a:extLst>
+          </p:cNvPr>
+          <p:cNvSpPr>
+            <a:spLocks noGrp="1"/>
+          </p:cNvSpPr>
+          <p:nvPr>
+            <p:ph type="body" idx="1"/>
+          </p:nvPr>
+        </p:nvSpPr>
+        <p:spPr/>
+        <p:txBody>
+          <a:bodyPr/>
+          <a:lstStyle/>
+          <a:p>
+            <a:endParaRPr lang="en-US" dirty="0"/>
+          </a:p>
+        </p:txBody>
+      </p:sp>
+      <p:sp>
+        <p:nvSpPr>
+          <p:cNvPr id="4" name="Slide Number Placeholder 3">
+            <a:extLst>
+              <a:ext uri="{FF2B5EF4-FFF2-40B4-BE49-F238E27FC236}">
+                <a16:creationId xmlns:a16="http://schemas.microsoft.com/office/drawing/2014/main" id="{3CC9F483-EB7A-9071-C50E-C782492B4AA4}"/>
+              </a:ext>
+            </a:extLst>
+          </p:cNvPr>
+          <p:cNvSpPr>
+            <a:spLocks noGrp="1"/>
+          </p:cNvSpPr>
+          <p:nvPr>
+            <p:ph type="sldNum" sz="quarter" idx="10"/>
+          </p:nvPr>
+        </p:nvSpPr>
+        <p:spPr/>
+        <p:txBody>
+          <a:bodyPr/>
+          <a:lstStyle/>
+          <a:p>
+            <a:fld id="{F7021451-1387-4CA6-816F-3879F97B5CBC}" type="slidenum">
+              <a:rPr lang="en-US"/>
+              <a:t>23</a:t>
+            </a:fld>
+            <a:endParaRPr lang="en-US"/>
+          </a:p>
+        </p:txBody>
+      </p:sp>
+    </p:spTree>
+    <p:extLst>
+      <p:ext uri="{BB962C8B-B14F-4D97-AF65-F5344CB8AC3E}">
+        <p14:creationId xmlns:p14="http://schemas.microsoft.com/office/powerpoint/2010/main" val="1893084099"/>
       </p:ext>
     </p:extLst>
   </p:cSld>
@@ -18542,6 +18760,505 @@
         </p:txBody>
       </p:sp>
     </p:spTree>
+  </p:cSld>
+  <p:clrMapOvr>
+    <a:masterClrMapping/>
+  </p:clrMapOvr>
+</p:sld>
+</file>
+
+<file path=ppt/slides/slide22.xml><?xml version="1.0" encoding="utf-8"?>
+<p:sld xmlns:a="http://schemas.openxmlformats.org/drawingml/2006/main" xmlns:r="http://schemas.openxmlformats.org/officeDocument/2006/relationships" xmlns:p="http://schemas.openxmlformats.org/presentationml/2006/main">
+  <p:cSld>
+    <p:bg>
+      <p:bgPr>
+        <a:solidFill>
+          <a:srgbClr val="161616"/>
+        </a:solidFill>
+        <a:effectLst/>
+      </p:bgPr>
+    </p:bg>
+    <p:spTree>
+      <p:nvGrpSpPr>
+        <p:cNvPr id="1" name="">
+          <a:extLst>
+            <a:ext uri="{FF2B5EF4-FFF2-40B4-BE49-F238E27FC236}">
+              <a16:creationId xmlns:a16="http://schemas.microsoft.com/office/drawing/2014/main" id="{0E0A4FE1-D4F6-9C85-C060-DD3FE2D9F435}"/>
+            </a:ext>
+          </a:extLst>
+        </p:cNvPr>
+        <p:cNvGrpSpPr/>
+        <p:nvPr/>
+      </p:nvGrpSpPr>
+      <p:grpSpPr>
+        <a:xfrm>
+          <a:off x="0" y="0"/>
+          <a:ext cx="0" cy="0"/>
+          <a:chOff x="0" y="0"/>
+          <a:chExt cx="0" cy="0"/>
+        </a:xfrm>
+      </p:grpSpPr>
+      <p:sp>
+        <p:nvSpPr>
+          <p:cNvPr id="2" name="Shape 0">
+            <a:extLst>
+              <a:ext uri="{FF2B5EF4-FFF2-40B4-BE49-F238E27FC236}">
+                <a16:creationId xmlns:a16="http://schemas.microsoft.com/office/drawing/2014/main" id="{EAE06ED2-D0FD-D6A7-5938-8B606EFC37C8}"/>
+              </a:ext>
+            </a:extLst>
+          </p:cNvPr>
+          <p:cNvSpPr/>
+          <p:nvPr/>
+        </p:nvSpPr>
+        <p:spPr>
+          <a:xfrm>
+            <a:off x="457182" y="409799"/>
+            <a:ext cx="95240" cy="95240"/>
+          </a:xfrm>
+          <a:prstGeom prst="rect">
+            <a:avLst/>
+          </a:prstGeom>
+          <a:solidFill>
+            <a:srgbClr val="E5484D"/>
+          </a:solidFill>
+          <a:ln/>
+        </p:spPr>
+        <p:txBody>
+          <a:bodyPr/>
+          <a:lstStyle/>
+          <a:p>
+            <a:endParaRPr lang="en-AU" sz="900">
+              <a:solidFill>
+                <a:srgbClr val="E5484D"/>
+              </a:solidFill>
+            </a:endParaRPr>
+          </a:p>
+        </p:txBody>
+      </p:sp>
+      <p:sp>
+        <p:nvSpPr>
+          <p:cNvPr id="3" name="Text 1">
+            <a:extLst>
+              <a:ext uri="{FF2B5EF4-FFF2-40B4-BE49-F238E27FC236}">
+                <a16:creationId xmlns:a16="http://schemas.microsoft.com/office/drawing/2014/main" id="{2A638EE7-8698-20CF-97FF-C617CA6C7057}"/>
+              </a:ext>
+            </a:extLst>
+          </p:cNvPr>
+          <p:cNvSpPr/>
+          <p:nvPr/>
+        </p:nvSpPr>
+        <p:spPr>
+          <a:xfrm>
+            <a:off x="647661" y="361942"/>
+            <a:ext cx="811279" cy="240484"/>
+          </a:xfrm>
+          <a:prstGeom prst="rect">
+            <a:avLst/>
+          </a:prstGeom>
+          <a:noFill/>
+          <a:ln/>
+        </p:spPr>
+        <p:txBody>
+          <a:bodyPr wrap="square" lIns="12700" tIns="12700" rIns="12700" bIns="12700" rtlCol="0" anchor="t">
+            <a:normAutofit/>
+          </a:bodyPr>
+          <a:lstStyle/>
+          <a:p>
+            <a:pPr>
+              <a:lnSpc>
+                <a:spcPct val="109770"/>
+              </a:lnSpc>
+            </a:pPr>
+            <a:r>
+              <a:rPr lang="en-US" sz="1125" b="1" kern="0" spc="270" dirty="0">
+                <a:solidFill>
+                  <a:srgbClr val="E5484D"/>
+                </a:solidFill>
+                <a:latin typeface="Arial" pitchFamily="34" charset="0"/>
+                <a:ea typeface="Arial" pitchFamily="34" charset="-122"/>
+                <a:cs typeface="Arial" pitchFamily="34" charset="-120"/>
+              </a:rPr>
+              <a:t>TMIZAN</a:t>
+            </a:r>
+            <a:endParaRPr lang="en-US" sz="1125" dirty="0">
+              <a:solidFill>
+                <a:srgbClr val="E5484D"/>
+              </a:solidFill>
+            </a:endParaRPr>
+          </a:p>
+        </p:txBody>
+      </p:sp>
+      <p:sp>
+        <p:nvSpPr>
+          <p:cNvPr id="4" name="Text 2">
+            <a:extLst>
+              <a:ext uri="{FF2B5EF4-FFF2-40B4-BE49-F238E27FC236}">
+                <a16:creationId xmlns:a16="http://schemas.microsoft.com/office/drawing/2014/main" id="{02BDC9CC-BE66-191A-194F-4071ED2D5C5D}"/>
+              </a:ext>
+            </a:extLst>
+          </p:cNvPr>
+          <p:cNvSpPr/>
+          <p:nvPr/>
+        </p:nvSpPr>
+        <p:spPr>
+          <a:xfrm>
+            <a:off x="457182" y="2187774"/>
+            <a:ext cx="7858125" cy="676271"/>
+          </a:xfrm>
+          <a:prstGeom prst="rect">
+            <a:avLst/>
+          </a:prstGeom>
+          <a:noFill/>
+          <a:ln/>
+        </p:spPr>
+        <p:txBody>
+          <a:bodyPr wrap="square" lIns="12700" tIns="12700" rIns="12700" bIns="12700" rtlCol="0" anchor="t">
+            <a:normAutofit/>
+          </a:bodyPr>
+          <a:lstStyle/>
+          <a:p>
+            <a:pPr algn="ctr">
+              <a:lnSpc>
+                <a:spcPct val="65154"/>
+              </a:lnSpc>
+            </a:pPr>
+            <a:r>
+              <a:rPr lang="hr-HR" sz="5625" b="1" kern="0" spc="-169" dirty="0">
+                <a:solidFill>
+                  <a:srgbClr val="F3F2F2"/>
+                </a:solidFill>
+                <a:latin typeface="Arial" pitchFamily="34" charset="0"/>
+                <a:ea typeface="Arial" pitchFamily="34" charset="-122"/>
+                <a:cs typeface="Arial" pitchFamily="34" charset="-120"/>
+              </a:rPr>
+              <a:t>Hvala na pažnji!</a:t>
+            </a:r>
+            <a:endParaRPr lang="en-US" sz="5625" dirty="0"/>
+          </a:p>
+        </p:txBody>
+      </p:sp>
+      <p:sp>
+        <p:nvSpPr>
+          <p:cNvPr id="5" name="Shape 3">
+            <a:extLst>
+              <a:ext uri="{FF2B5EF4-FFF2-40B4-BE49-F238E27FC236}">
+                <a16:creationId xmlns:a16="http://schemas.microsoft.com/office/drawing/2014/main" id="{E0DBBAEE-5FCD-7436-1AA2-12202E03AD74}"/>
+              </a:ext>
+            </a:extLst>
+          </p:cNvPr>
+          <p:cNvSpPr/>
+          <p:nvPr/>
+        </p:nvSpPr>
+        <p:spPr>
+          <a:xfrm>
+            <a:off x="457182" y="4472990"/>
+            <a:ext cx="8229627" cy="16537"/>
+          </a:xfrm>
+          <a:prstGeom prst="rect">
+            <a:avLst/>
+          </a:prstGeom>
+          <a:solidFill>
+            <a:srgbClr val="E5484D"/>
+          </a:solidFill>
+          <a:ln/>
+        </p:spPr>
+        <p:txBody>
+          <a:bodyPr/>
+          <a:lstStyle/>
+          <a:p>
+            <a:endParaRPr lang="en-AU" sz="900">
+              <a:solidFill>
+                <a:srgbClr val="E5484D"/>
+              </a:solidFill>
+            </a:endParaRPr>
+          </a:p>
+        </p:txBody>
+      </p:sp>
+      <p:sp>
+        <p:nvSpPr>
+          <p:cNvPr id="11" name="TextBox 10">
+            <a:extLst>
+              <a:ext uri="{FF2B5EF4-FFF2-40B4-BE49-F238E27FC236}">
+                <a16:creationId xmlns:a16="http://schemas.microsoft.com/office/drawing/2014/main" id="{F498460F-18DA-D75C-D8C2-B77833367B45}"/>
+              </a:ext>
+            </a:extLst>
+          </p:cNvPr>
+          <p:cNvSpPr txBox="1"/>
+          <p:nvPr/>
+        </p:nvSpPr>
+        <p:spPr>
+          <a:xfrm>
+            <a:off x="8315307" y="4534767"/>
+            <a:ext cx="516488" cy="369332"/>
+          </a:xfrm>
+          <a:prstGeom prst="rect">
+            <a:avLst/>
+          </a:prstGeom>
+          <a:noFill/>
+        </p:spPr>
+        <p:txBody>
+          <a:bodyPr wrap="none" rtlCol="0">
+            <a:spAutoFit/>
+          </a:bodyPr>
+          <a:lstStyle/>
+          <a:p>
+            <a:r>
+              <a:rPr lang="hr-HR" dirty="0">
+                <a:solidFill>
+                  <a:schemeClr val="bg1"/>
+                </a:solidFill>
+              </a:rPr>
+              <a:t>. . . </a:t>
+            </a:r>
+            <a:endParaRPr lang="en-AU" dirty="0">
+              <a:solidFill>
+                <a:schemeClr val="bg1"/>
+              </a:solidFill>
+            </a:endParaRPr>
+          </a:p>
+        </p:txBody>
+      </p:sp>
+    </p:spTree>
+    <p:extLst>
+      <p:ext uri="{BB962C8B-B14F-4D97-AF65-F5344CB8AC3E}">
+        <p14:creationId xmlns:p14="http://schemas.microsoft.com/office/powerpoint/2010/main" val="1296459075"/>
+      </p:ext>
+    </p:extLst>
+  </p:cSld>
+  <p:clrMapOvr>
+    <a:masterClrMapping/>
+  </p:clrMapOvr>
+</p:sld>
+</file>
+
+<file path=ppt/slides/slide23.xml><?xml version="1.0" encoding="utf-8"?>
+<p:sld xmlns:a="http://schemas.openxmlformats.org/drawingml/2006/main" xmlns:r="http://schemas.openxmlformats.org/officeDocument/2006/relationships" xmlns:p="http://schemas.openxmlformats.org/presentationml/2006/main">
+  <p:cSld>
+    <p:bg>
+      <p:bgPr>
+        <a:solidFill>
+          <a:srgbClr val="161616"/>
+        </a:solidFill>
+        <a:effectLst/>
+      </p:bgPr>
+    </p:bg>
+    <p:spTree>
+      <p:nvGrpSpPr>
+        <p:cNvPr id="1" name="">
+          <a:extLst>
+            <a:ext uri="{FF2B5EF4-FFF2-40B4-BE49-F238E27FC236}">
+              <a16:creationId xmlns:a16="http://schemas.microsoft.com/office/drawing/2014/main" id="{C52BB4D4-5C85-7CDC-E011-62F4F63ECD24}"/>
+            </a:ext>
+          </a:extLst>
+        </p:cNvPr>
+        <p:cNvGrpSpPr/>
+        <p:nvPr/>
+      </p:nvGrpSpPr>
+      <p:grpSpPr>
+        <a:xfrm>
+          <a:off x="0" y="0"/>
+          <a:ext cx="0" cy="0"/>
+          <a:chOff x="0" y="0"/>
+          <a:chExt cx="0" cy="0"/>
+        </a:xfrm>
+      </p:grpSpPr>
+      <p:sp>
+        <p:nvSpPr>
+          <p:cNvPr id="2" name="Shape 0">
+            <a:extLst>
+              <a:ext uri="{FF2B5EF4-FFF2-40B4-BE49-F238E27FC236}">
+                <a16:creationId xmlns:a16="http://schemas.microsoft.com/office/drawing/2014/main" id="{B1130184-A611-BDA1-488D-8F6291FF27BE}"/>
+              </a:ext>
+            </a:extLst>
+          </p:cNvPr>
+          <p:cNvSpPr/>
+          <p:nvPr/>
+        </p:nvSpPr>
+        <p:spPr>
+          <a:xfrm>
+            <a:off x="457182" y="409799"/>
+            <a:ext cx="95240" cy="95240"/>
+          </a:xfrm>
+          <a:prstGeom prst="rect">
+            <a:avLst/>
+          </a:prstGeom>
+          <a:solidFill>
+            <a:srgbClr val="E5484D"/>
+          </a:solidFill>
+          <a:ln/>
+        </p:spPr>
+        <p:txBody>
+          <a:bodyPr/>
+          <a:lstStyle/>
+          <a:p>
+            <a:endParaRPr lang="en-AU" sz="900">
+              <a:solidFill>
+                <a:srgbClr val="E5484D"/>
+              </a:solidFill>
+            </a:endParaRPr>
+          </a:p>
+        </p:txBody>
+      </p:sp>
+      <p:sp>
+        <p:nvSpPr>
+          <p:cNvPr id="3" name="Text 1">
+            <a:extLst>
+              <a:ext uri="{FF2B5EF4-FFF2-40B4-BE49-F238E27FC236}">
+                <a16:creationId xmlns:a16="http://schemas.microsoft.com/office/drawing/2014/main" id="{12495DAD-6F67-0D05-64A2-C0513EA07A8C}"/>
+              </a:ext>
+            </a:extLst>
+          </p:cNvPr>
+          <p:cNvSpPr/>
+          <p:nvPr/>
+        </p:nvSpPr>
+        <p:spPr>
+          <a:xfrm>
+            <a:off x="647661" y="361942"/>
+            <a:ext cx="811279" cy="240484"/>
+          </a:xfrm>
+          <a:prstGeom prst="rect">
+            <a:avLst/>
+          </a:prstGeom>
+          <a:noFill/>
+          <a:ln/>
+        </p:spPr>
+        <p:txBody>
+          <a:bodyPr wrap="square" lIns="12700" tIns="12700" rIns="12700" bIns="12700" rtlCol="0" anchor="t">
+            <a:normAutofit/>
+          </a:bodyPr>
+          <a:lstStyle/>
+          <a:p>
+            <a:pPr>
+              <a:lnSpc>
+                <a:spcPct val="109770"/>
+              </a:lnSpc>
+            </a:pPr>
+            <a:r>
+              <a:rPr lang="en-US" sz="1125" b="1" kern="0" spc="270" dirty="0">
+                <a:solidFill>
+                  <a:srgbClr val="E5484D"/>
+                </a:solidFill>
+                <a:latin typeface="Arial" pitchFamily="34" charset="0"/>
+                <a:ea typeface="Arial" pitchFamily="34" charset="-122"/>
+                <a:cs typeface="Arial" pitchFamily="34" charset="-120"/>
+              </a:rPr>
+              <a:t>TMIZAN</a:t>
+            </a:r>
+            <a:endParaRPr lang="en-US" sz="1125" dirty="0">
+              <a:solidFill>
+                <a:srgbClr val="E5484D"/>
+              </a:solidFill>
+            </a:endParaRPr>
+          </a:p>
+        </p:txBody>
+      </p:sp>
+      <p:sp>
+        <p:nvSpPr>
+          <p:cNvPr id="4" name="Text 2">
+            <a:extLst>
+              <a:ext uri="{FF2B5EF4-FFF2-40B4-BE49-F238E27FC236}">
+                <a16:creationId xmlns:a16="http://schemas.microsoft.com/office/drawing/2014/main" id="{9087E25F-A892-8AD8-D56D-6F20BAAB2246}"/>
+              </a:ext>
+            </a:extLst>
+          </p:cNvPr>
+          <p:cNvSpPr/>
+          <p:nvPr/>
+        </p:nvSpPr>
+        <p:spPr>
+          <a:xfrm>
+            <a:off x="504802" y="2137059"/>
+            <a:ext cx="7858125" cy="676271"/>
+          </a:xfrm>
+          <a:prstGeom prst="rect">
+            <a:avLst/>
+          </a:prstGeom>
+          <a:noFill/>
+          <a:ln/>
+        </p:spPr>
+        <p:txBody>
+          <a:bodyPr wrap="square" lIns="12700" tIns="12700" rIns="12700" bIns="12700" rtlCol="0" anchor="t">
+            <a:normAutofit fontScale="92500" lnSpcReduction="10000"/>
+          </a:bodyPr>
+          <a:lstStyle/>
+          <a:p>
+            <a:pPr algn="ctr">
+              <a:lnSpc>
+                <a:spcPct val="65154"/>
+              </a:lnSpc>
+            </a:pPr>
+            <a:r>
+              <a:rPr lang="hr-HR" sz="7200" b="1" kern="0" spc="600" dirty="0">
+                <a:solidFill>
+                  <a:schemeClr val="bg1"/>
+                </a:solidFill>
+                <a:latin typeface="Arial" panose="020B0604020202020204" pitchFamily="34" charset="0"/>
+                <a:cs typeface="Arial" panose="020B0604020202020204" pitchFamily="34" charset="0"/>
+              </a:rPr>
+              <a:t>Pitanja</a:t>
+            </a:r>
+            <a:r>
+              <a:rPr lang="hr-HR" sz="7200" b="1" kern="0" spc="-169" dirty="0">
+                <a:solidFill>
+                  <a:schemeClr val="bg1"/>
+                </a:solidFill>
+                <a:latin typeface="Arial" panose="020B0604020202020204" pitchFamily="34" charset="0"/>
+                <a:cs typeface="Arial" panose="020B0604020202020204" pitchFamily="34" charset="0"/>
+              </a:rPr>
+              <a:t>?</a:t>
+            </a:r>
+            <a:endParaRPr lang="en-US" sz="7200" dirty="0">
+              <a:solidFill>
+                <a:schemeClr val="bg1"/>
+              </a:solidFill>
+              <a:latin typeface="Arial" panose="020B0604020202020204" pitchFamily="34" charset="0"/>
+              <a:cs typeface="Arial" panose="020B0604020202020204" pitchFamily="34" charset="0"/>
+            </a:endParaRPr>
+          </a:p>
+        </p:txBody>
+      </p:sp>
+      <p:sp>
+        <p:nvSpPr>
+          <p:cNvPr id="5" name="Shape 3">
+            <a:extLst>
+              <a:ext uri="{FF2B5EF4-FFF2-40B4-BE49-F238E27FC236}">
+                <a16:creationId xmlns:a16="http://schemas.microsoft.com/office/drawing/2014/main" id="{E8AA4AE2-82E7-02BC-BE76-60D31B967D6F}"/>
+              </a:ext>
+            </a:extLst>
+          </p:cNvPr>
+          <p:cNvSpPr/>
+          <p:nvPr/>
+        </p:nvSpPr>
+        <p:spPr>
+          <a:xfrm>
+            <a:off x="457182" y="4472990"/>
+            <a:ext cx="8229627" cy="16537"/>
+          </a:xfrm>
+          <a:prstGeom prst="rect">
+            <a:avLst/>
+          </a:prstGeom>
+          <a:solidFill>
+            <a:srgbClr val="E5484D"/>
+          </a:solidFill>
+          <a:ln/>
+        </p:spPr>
+        <p:txBody>
+          <a:bodyPr/>
+          <a:lstStyle/>
+          <a:p>
+            <a:endParaRPr lang="en-AU" sz="900">
+              <a:solidFill>
+                <a:srgbClr val="E5484D"/>
+              </a:solidFill>
+            </a:endParaRPr>
+          </a:p>
+        </p:txBody>
+      </p:sp>
+    </p:spTree>
+    <p:extLst>
+      <p:ext uri="{BB962C8B-B14F-4D97-AF65-F5344CB8AC3E}">
+        <p14:creationId xmlns:p14="http://schemas.microsoft.com/office/powerpoint/2010/main" val="272242336"/>
+      </p:ext>
+    </p:extLst>
   </p:cSld>
   <p:clrMapOvr>
     <a:masterClrMapping/>
